--- a/1.2 JD+3 Overview.pptx
+++ b/1.2 JD+3 Overview.pptx
@@ -270,7 +270,7 @@
       <p15:notesGuideLst xmlns:p15="http://schemas.microsoft.com/office/powerpoint/2012/main"/>
     </p:ext>
     <p:ext uri="http://customooxmlschemas.google.com/">
-      <go:slidesCustomData xmlns="" xmlns:go="http://customooxmlschemas.google.com/" xmlns:ahyp="http://schemas.microsoft.com/office/drawing/2018/hyperlinkcolor" xmlns:p15="http://schemas.microsoft.com/office/powerpoint/2012/main" xmlns:p14="http://schemas.microsoft.com/office/powerpoint/2010/main" xmlns:com="http://schemas.openxmlformats.org/drawingml/2006/compatibility" xmlns:pvml="urn:schemas-microsoft-com:office:powerpoint" xmlns:v="urn:schemas-microsoft-com:vml" xmlns:o="urn:schemas-microsoft-com:office:office" xmlns:dgm="http://schemas.openxmlformats.org/drawingml/2006/diagram" xmlns:c="http://schemas.openxmlformats.org/drawingml/2006/chart" xmlns:mv="urn:schemas-microsoft-com:mac:vml" xmlns:mc="http://schemas.openxmlformats.org/markup-compatibility/2006" r:id="rId59" roundtripDataSignature="AMtx7mh3YP3xexYcFoahXa2ehi0H5V4Zaw=="/>
+      <go:slidesCustomData xmlns:mc="http://schemas.openxmlformats.org/markup-compatibility/2006" xmlns:mv="urn:schemas-microsoft-com:mac:vml" xmlns:c="http://schemas.openxmlformats.org/drawingml/2006/chart" xmlns:dgm="http://schemas.openxmlformats.org/drawingml/2006/diagram" xmlns:o="urn:schemas-microsoft-com:office:office" xmlns:v="urn:schemas-microsoft-com:vml" xmlns:pvml="urn:schemas-microsoft-com:office:powerpoint" xmlns:com="http://schemas.openxmlformats.org/drawingml/2006/compatibility" xmlns:p14="http://schemas.microsoft.com/office/powerpoint/2010/main" xmlns:p15="http://schemas.microsoft.com/office/powerpoint/2012/main" xmlns:ahyp="http://schemas.microsoft.com/office/drawing/2018/hyperlinkcolor" xmlns:go="http://customooxmlschemas.google.com/" xmlns="" r:id="rId59" roundtripDataSignature="AMtx7mh3YP3xexYcFoahXa2ehi0H5V4Zaw=="/>
     </p:ext>
   </p:extLst>
 </p:presentation>
@@ -370,7 +370,7 @@
           <a:p>
             <a:fld id="{0CBFB8CE-488C-4A7E-87F2-3AF6127C51C1}" type="datetimeFigureOut">
               <a:rPr lang="en-IE" smtClean="0"/>
-              <a:t>27/08/2026</a:t>
+              <a:t>22/09/2026</a:t>
             </a:fld>
             <a:endParaRPr lang="en-IE"/>
           </a:p>
@@ -6988,8 +6988,8 @@
         </p:nvSpPr>
         <p:spPr>
           <a:xfrm>
-            <a:off x="582733" y="2434402"/>
-            <a:ext cx="1816510" cy="994598"/>
+            <a:off x="365760" y="2434402"/>
+            <a:ext cx="2033483" cy="994598"/>
           </a:xfrm>
           <a:prstGeom prst="roundRect">
             <a:avLst/>
@@ -7591,8 +7591,8 @@
         </p:nvSpPr>
         <p:spPr>
           <a:xfrm>
-            <a:off x="582732" y="3856739"/>
-            <a:ext cx="1816510" cy="994598"/>
+            <a:off x="365759" y="3856739"/>
+            <a:ext cx="2033483" cy="994598"/>
           </a:xfrm>
           <a:prstGeom prst="roundRect">
             <a:avLst/>
@@ -7677,8 +7677,8 @@
         </p:nvSpPr>
         <p:spPr>
           <a:xfrm>
-            <a:off x="582732" y="5291462"/>
-            <a:ext cx="1816510" cy="994598"/>
+            <a:off x="365759" y="5291462"/>
+            <a:ext cx="2033483" cy="994598"/>
           </a:xfrm>
           <a:prstGeom prst="roundRect">
             <a:avLst/>
@@ -7841,8 +7841,8 @@
         </p:nvSpPr>
         <p:spPr>
           <a:xfrm>
-            <a:off x="5532853" y="5570472"/>
-            <a:ext cx="2078450" cy="643003"/>
+            <a:off x="5532852" y="5570472"/>
+            <a:ext cx="2313289" cy="643003"/>
           </a:xfrm>
           <a:prstGeom prst="roundRect">
             <a:avLst/>
@@ -8000,8 +8000,8 @@
         </p:nvCxnSpPr>
         <p:spPr>
           <a:xfrm rot="16200000" flipV="1">
-            <a:off x="5734550" y="4732944"/>
-            <a:ext cx="664980" cy="1010076"/>
+            <a:off x="5793260" y="4674234"/>
+            <a:ext cx="664980" cy="1127495"/>
           </a:xfrm>
           <a:prstGeom prst="bentConnector3">
             <a:avLst>
@@ -9390,6 +9390,15 @@
 </file>
 
 <file path=customXml/item1.xml><?xml version="1.0" encoding="utf-8"?>
+<?mso-contentType ?>
+<FormTemplates xmlns="http://schemas.microsoft.com/sharepoint/v3/contenttype/forms">
+  <Display>DocumentLibraryForm</Display>
+  <Edit>DocumentLibraryForm</Edit>
+  <New>DocumentLibraryForm</New>
+</FormTemplates>
+</file>
+
+<file path=customXml/item2.xml><?xml version="1.0" encoding="utf-8"?>
 <p:properties xmlns:p="http://schemas.microsoft.com/office/2006/metadata/properties" xmlns:xsi="http://www.w3.org/2001/XMLSchema-instance" xmlns:pc="http://schemas.microsoft.com/office/infopath/2007/PartnerControls">
   <documentManagement>
     <lcf76f155ced4ddcb4097134ff3c332f xmlns="0e422b70-e85d-4377-8ee0-b6227433d381">
@@ -9398,15 +9407,6 @@
     <TaxCatchAll xmlns="199f642e-5af9-486c-ac06-f366742ef41a"/>
   </documentManagement>
 </p:properties>
-</file>
-
-<file path=customXml/item2.xml><?xml version="1.0" encoding="utf-8"?>
-<?mso-contentType ?>
-<FormTemplates xmlns="http://schemas.microsoft.com/sharepoint/v3/contenttype/forms">
-  <Display>DocumentLibraryForm</Display>
-  <Edit>DocumentLibraryForm</Edit>
-  <New>DocumentLibraryForm</New>
-</FormTemplates>
 </file>
 
 <file path=customXml/item3.xml><?xml version="1.0" encoding="utf-8"?>
@@ -9651,6 +9651,14 @@
 </file>
 
 <file path=customXml/itemProps1.xml><?xml version="1.0" encoding="utf-8"?>
+<ds:datastoreItem xmlns:ds="http://schemas.openxmlformats.org/officeDocument/2006/customXml" ds:itemID="{67DD9E9F-9EEB-4105-B29B-819486C2855A}">
+  <ds:schemaRefs>
+    <ds:schemaRef ds:uri="http://schemas.microsoft.com/sharepoint/v3/contenttype/forms"/>
+  </ds:schemaRefs>
+</ds:datastoreItem>
+</file>
+
+<file path=customXml/itemProps2.xml><?xml version="1.0" encoding="utf-8"?>
 <ds:datastoreItem xmlns:ds="http://schemas.openxmlformats.org/officeDocument/2006/customXml" ds:itemID="{2D6C293B-B8B4-4284-A17E-9F9E4C32B25A}">
   <ds:schemaRefs>
     <ds:schemaRef ds:uri="http://schemas.microsoft.com/office/2006/documentManagement/types"/>
@@ -9663,14 +9671,6 @@
     <ds:schemaRef ds:uri="http://schemas.openxmlformats.org/package/2006/metadata/core-properties"/>
     <ds:schemaRef ds:uri="http://schemas.microsoft.com/office/2006/metadata/properties"/>
     <ds:schemaRef ds:uri="http://www.w3.org/XML/1998/namespace"/>
-  </ds:schemaRefs>
-</ds:datastoreItem>
-</file>
-
-<file path=customXml/itemProps2.xml><?xml version="1.0" encoding="utf-8"?>
-<ds:datastoreItem xmlns:ds="http://schemas.openxmlformats.org/officeDocument/2006/customXml" ds:itemID="{67DD9E9F-9EEB-4105-B29B-819486C2855A}">
-  <ds:schemaRefs>
-    <ds:schemaRef ds:uri="http://schemas.microsoft.com/sharepoint/v3/contenttype/forms"/>
   </ds:schemaRefs>
 </ds:datastoreItem>
 </file>

--- a/1.2 JD+3 Overview.pptx
+++ b/1.2 JD+3 Overview.pptx
@@ -270,7 +270,7 @@
       <p15:notesGuideLst xmlns:p15="http://schemas.microsoft.com/office/powerpoint/2012/main"/>
     </p:ext>
     <p:ext uri="http://customooxmlschemas.google.com/">
-      <go:slidesCustomData xmlns:mc="http://schemas.openxmlformats.org/markup-compatibility/2006" xmlns:mv="urn:schemas-microsoft-com:mac:vml" xmlns:c="http://schemas.openxmlformats.org/drawingml/2006/chart" xmlns:dgm="http://schemas.openxmlformats.org/drawingml/2006/diagram" xmlns:o="urn:schemas-microsoft-com:office:office" xmlns:v="urn:schemas-microsoft-com:vml" xmlns:pvml="urn:schemas-microsoft-com:office:powerpoint" xmlns:com="http://schemas.openxmlformats.org/drawingml/2006/compatibility" xmlns:p14="http://schemas.microsoft.com/office/powerpoint/2010/main" xmlns:p15="http://schemas.microsoft.com/office/powerpoint/2012/main" xmlns:ahyp="http://schemas.microsoft.com/office/drawing/2018/hyperlinkcolor" xmlns:go="http://customooxmlschemas.google.com/" xmlns="" r:id="rId59" roundtripDataSignature="AMtx7mh3YP3xexYcFoahXa2ehi0H5V4Zaw=="/>
+      <go:slidesCustomData xmlns="" xmlns:go="http://customooxmlschemas.google.com/" xmlns:ahyp="http://schemas.microsoft.com/office/drawing/2018/hyperlinkcolor" xmlns:p15="http://schemas.microsoft.com/office/powerpoint/2012/main" xmlns:p14="http://schemas.microsoft.com/office/powerpoint/2010/main" xmlns:com="http://schemas.openxmlformats.org/drawingml/2006/compatibility" xmlns:pvml="urn:schemas-microsoft-com:office:powerpoint" xmlns:v="urn:schemas-microsoft-com:vml" xmlns:o="urn:schemas-microsoft-com:office:office" xmlns:dgm="http://schemas.openxmlformats.org/drawingml/2006/diagram" xmlns:c="http://schemas.openxmlformats.org/drawingml/2006/chart" xmlns:mv="urn:schemas-microsoft-com:mac:vml" xmlns:mc="http://schemas.openxmlformats.org/markup-compatibility/2006" r:id="rId59" roundtripDataSignature="AMtx7mh3YP3xexYcFoahXa2ehi0H5V4Zaw=="/>
     </p:ext>
   </p:extLst>
 </p:presentation>
@@ -370,7 +370,7 @@
           <a:p>
             <a:fld id="{0CBFB8CE-488C-4A7E-87F2-3AF6127C51C1}" type="datetimeFigureOut">
               <a:rPr lang="en-IE" smtClean="0"/>
-              <a:t>22/09/2026</a:t>
+              <a:t>01/10/2026</a:t>
             </a:fld>
             <a:endParaRPr lang="en-IE"/>
           </a:p>
@@ -2475,8 +2475,8 @@
         </p:nvSpPr>
         <p:spPr>
           <a:xfrm>
-            <a:off x="970722" y="1901951"/>
-            <a:ext cx="10515597" cy="4194176"/>
+            <a:off x="970722" y="1371600"/>
+            <a:ext cx="10515597" cy="4724527"/>
           </a:xfrm>
         </p:spPr>
         <p:txBody>
@@ -4964,7 +4964,7 @@
           <a:p>
             <a:r>
               <a:rPr lang="en-GB"/>
-              <a:t>CONTRACTORS ORGANISING SOME OF THE COURSES ARE ACTING UNDER A FRAMEWORK CONTRACT CONCLUDED WITH THE COMMISSION</a:t>
+              <a:t>JD+ 3.x</a:t>
             </a:r>
           </a:p>
         </p:txBody>
@@ -5463,7 +5463,7 @@
     <p:sldLayoutId id="2147483723" r:id="rId5"/>
     <p:sldLayoutId id="2147483728" r:id="rId6"/>
   </p:sldLayoutIdLst>
-  <p:hf hdr="0" ftr="0" dt="0"/>
+  <p:hf hdr="0" dt="0"/>
   <p:txStyles>
     <p:titleStyle>
       <a:defPPr marR="0" lvl="0" algn="l" rtl="0">
@@ -6229,10 +6229,9 @@
           <a:lstStyle/>
           <a:p>
             <a:r>
-              <a:rPr lang="en-IE"/>
-              <a:t>JD+ 3.0</a:t>
-            </a:r>
-            <a:endParaRPr lang="en-IE" dirty="0"/>
+              <a:rPr lang="en-IE" dirty="0"/>
+              <a:t>1.2 JD+ 3.x</a:t>
+            </a:r>
           </a:p>
         </p:txBody>
       </p:sp>
@@ -6322,7 +6321,7 @@
             </a:r>
             <a:r>
               <a:rPr lang="fr-BE" dirty="0"/>
-              <a:t> new in JD+ 3.0?</a:t>
+              <a:t> new in JD+ 3.x?</a:t>
             </a:r>
             <a:endParaRPr lang="en-GB" dirty="0"/>
           </a:p>
@@ -6341,7 +6340,7 @@
             <a:spLocks noGrp="1"/>
           </p:cNvSpPr>
           <p:nvPr>
-            <p:ph idx="1"/>
+            <p:ph sz="half" idx="2"/>
           </p:nvPr>
         </p:nvSpPr>
         <p:spPr/>
@@ -6350,46 +6349,46 @@
           <a:lstStyle/>
           <a:p>
             <a:r>
-              <a:rPr lang="en-GB" dirty="0"/>
+              <a:rPr lang="en-GB" sz="2800" dirty="0"/>
               <a:t>Additional time series domains</a:t>
             </a:r>
           </a:p>
           <a:p>
             <a:pPr lvl="1"/>
             <a:r>
-              <a:rPr lang="en-GB" dirty="0"/>
+              <a:rPr lang="en-GB" sz="2400" dirty="0"/>
               <a:t>New concepts</a:t>
             </a:r>
           </a:p>
           <a:p>
             <a:r>
-              <a:rPr lang="en-GB" dirty="0"/>
+              <a:rPr lang="en-GB" sz="2800" dirty="0"/>
               <a:t>Design</a:t>
             </a:r>
           </a:p>
           <a:p>
             <a:pPr lvl="1"/>
             <a:r>
-              <a:rPr lang="en-GB" dirty="0"/>
+              <a:rPr lang="en-GB" sz="2400" dirty="0"/>
               <a:t>API / implementation / IO</a:t>
             </a:r>
           </a:p>
           <a:p>
             <a:r>
-              <a:rPr lang="en-GB" dirty="0"/>
+              <a:rPr lang="en-GB" sz="2800" dirty="0"/>
               <a:t>New algorithms</a:t>
             </a:r>
           </a:p>
           <a:p>
             <a:r>
-              <a:rPr lang="en-GB" dirty="0"/>
+              <a:rPr lang="en-GB" sz="2800" dirty="0"/>
               <a:t>Enhanced interaction with external tools/technologies</a:t>
             </a:r>
           </a:p>
           <a:p>
             <a:pPr lvl="1"/>
             <a:r>
-              <a:rPr lang="en-GB" dirty="0"/>
+              <a:rPr lang="en-GB" sz="2400" dirty="0"/>
               <a:t>New R packages</a:t>
             </a:r>
           </a:p>
@@ -6405,35 +6404,6 @@
           <a:p>
             <a:pPr lvl="1"/>
             <a:endParaRPr lang="en-GB" dirty="0"/>
-          </a:p>
-        </p:txBody>
-      </p:sp>
-      <p:sp>
-        <p:nvSpPr>
-          <p:cNvPr id="4" name="Date Placeholder 3">
-            <a:extLst>
-              <a:ext uri="{FF2B5EF4-FFF2-40B4-BE49-F238E27FC236}">
-                <a16:creationId xmlns:a16="http://schemas.microsoft.com/office/drawing/2014/main" id="{1F91F081-741A-4BB2-8222-52FA8D60687F}"/>
-              </a:ext>
-            </a:extLst>
-          </p:cNvPr>
-          <p:cNvSpPr>
-            <a:spLocks noGrp="1"/>
-          </p:cNvSpPr>
-          <p:nvPr>
-            <p:ph type="dt" sz="half" idx="10"/>
-          </p:nvPr>
-        </p:nvSpPr>
-        <p:spPr/>
-        <p:txBody>
-          <a:bodyPr/>
-          <a:lstStyle/>
-          <a:p>
-            <a:r>
-              <a:rPr lang="en-US"/>
-              <a:t>15-17/10/2024</a:t>
-            </a:r>
-            <a:endParaRPr lang="en-GB"/>
           </a:p>
         </p:txBody>
       </p:sp>
@@ -6450,7 +6420,40 @@
             <a:spLocks noGrp="1"/>
           </p:cNvSpPr>
           <p:nvPr>
-            <p:ph type="ftr" sz="quarter" idx="11"/>
+            <p:ph type="ftr" sz="quarter" idx="4294967295"/>
+          </p:nvPr>
+        </p:nvSpPr>
+        <p:spPr>
+          <a:xfrm>
+            <a:off x="0" y="0"/>
+            <a:ext cx="0" cy="0"/>
+          </a:xfrm>
+        </p:spPr>
+        <p:txBody>
+          <a:bodyPr/>
+          <a:lstStyle/>
+          <a:p>
+            <a:r>
+              <a:rPr lang="en-GB"/>
+              <a:t>JD+ 3.x</a:t>
+            </a:r>
+          </a:p>
+        </p:txBody>
+      </p:sp>
+      <p:sp>
+        <p:nvSpPr>
+          <p:cNvPr id="6" name="Espace réservé du numéro de diapositive 5">
+            <a:extLst>
+              <a:ext uri="{FF2B5EF4-FFF2-40B4-BE49-F238E27FC236}">
+                <a16:creationId xmlns:a16="http://schemas.microsoft.com/office/drawing/2014/main" id="{F1E3852F-C7F2-F17B-93A9-67F6D5D65AC8}"/>
+              </a:ext>
+            </a:extLst>
+          </p:cNvPr>
+          <p:cNvSpPr>
+            <a:spLocks noGrp="1"/>
+          </p:cNvSpPr>
+          <p:nvPr>
+            <p:ph type="sldNum" idx="12"/>
           </p:nvPr>
         </p:nvSpPr>
         <p:spPr/>
@@ -6458,10 +6461,12 @@
           <a:bodyPr/>
           <a:lstStyle/>
           <a:p>
-            <a:r>
-              <a:rPr lang="en-GB"/>
-              <a:t>CONTRACTORS ORGANISING SOME OF THE COURSES ARE ACTING UNDER A FRAMEWORK CONTRACT CONCLUDED WITH THE COMMISSION</a:t>
-            </a:r>
+            <a:fld id="{00000000-1234-1234-1234-123412341234}" type="slidenum">
+              <a:rPr lang="en-GB" smtClean="0"/>
+              <a:pPr/>
+              <a:t>2</a:t>
+            </a:fld>
+            <a:endParaRPr lang="en-GB"/>
           </a:p>
         </p:txBody>
       </p:sp>
@@ -6511,10 +6516,53 @@
             <p:ph type="title"/>
           </p:nvPr>
         </p:nvSpPr>
+        <p:spPr/>
+        <p:txBody>
+          <a:bodyPr/>
+          <a:lstStyle/>
+          <a:p>
+            <a:r>
+              <a:rPr lang="en-GB" dirty="0"/>
+              <a:t>2. </a:t>
+            </a:r>
+            <a:r>
+              <a:rPr lang="en-GB" dirty="0" err="1"/>
+              <a:t>JDemetra</a:t>
+            </a:r>
+            <a:r>
+              <a:rPr lang="en-GB" dirty="0"/>
+              <a:t> 3.0</a:t>
+            </a:r>
+            <a:br>
+              <a:rPr lang="en-GB" dirty="0"/>
+            </a:br>
+            <a:r>
+              <a:rPr lang="en-GB" dirty="0"/>
+              <a:t>New design </a:t>
+            </a:r>
+          </a:p>
+        </p:txBody>
+      </p:sp>
+      <p:sp>
+        <p:nvSpPr>
+          <p:cNvPr id="4" name="Footer Placeholder 3">
+            <a:extLst>
+              <a:ext uri="{FF2B5EF4-FFF2-40B4-BE49-F238E27FC236}">
+                <a16:creationId xmlns:a16="http://schemas.microsoft.com/office/drawing/2014/main" id="{6EA8026C-BE82-4662-873C-4B61A7A185D6}"/>
+              </a:ext>
+            </a:extLst>
+          </p:cNvPr>
+          <p:cNvSpPr>
+            <a:spLocks noGrp="1"/>
+          </p:cNvSpPr>
+          <p:nvPr>
+            <p:ph type="ftr" sz="quarter" idx="4294967295"/>
+          </p:nvPr>
+        </p:nvSpPr>
         <p:spPr>
           <a:xfrm>
-            <a:off x="707572" y="73853"/>
-            <a:ext cx="10515600" cy="1325563"/>
+            <a:off x="0" y="0"/>
+            <a:ext cx="0" cy="0"/>
           </a:xfrm>
         </p:spPr>
         <p:txBody>
@@ -6522,23 +6570,8 @@
           <a:lstStyle/>
           <a:p>
             <a:r>
-              <a:rPr lang="en-GB" dirty="0"/>
-              <a:t>2. </a:t>
-            </a:r>
-            <a:r>
-              <a:rPr lang="en-GB" dirty="0" err="1"/>
-              <a:t>JDemetra</a:t>
-            </a:r>
-            <a:r>
-              <a:rPr lang="en-GB" dirty="0"/>
-              <a:t> 3.0</a:t>
-            </a:r>
-            <a:br>
-              <a:rPr lang="en-GB" dirty="0"/>
-            </a:br>
-            <a:r>
-              <a:rPr lang="en-GB" dirty="0"/>
-              <a:t>New design </a:t>
+              <a:rPr lang="en-GB"/>
+              <a:t>JD+ 3.x</a:t>
             </a:r>
           </a:p>
         </p:txBody>
@@ -7634,7 +7667,7 @@
           <a:p>
             <a:pPr algn="ctr"/>
             <a:r>
-              <a:rPr lang="en-GB" sz="2000" dirty="0" err="1">
+              <a:rPr lang="en-GB" sz="2000" dirty="0">
                 <a:ln>
                   <a:solidFill>
                     <a:schemeClr val="accent1">
@@ -7646,20 +7679,8 @@
                   <a:schemeClr val="tx1"/>
                 </a:solidFill>
               </a:rPr>
-              <a:t>BusinessCycle</a:t>
-            </a:r>
-            <a:endParaRPr lang="en-GB" sz="2000" dirty="0">
-              <a:ln>
-                <a:solidFill>
-                  <a:schemeClr val="accent1">
-                    <a:shade val="50000"/>
-                  </a:schemeClr>
-                </a:solidFill>
-              </a:ln>
-              <a:solidFill>
-                <a:schemeClr val="tx1"/>
-              </a:solidFill>
-            </a:endParaRPr>
+              <a:t>Business Cycle</a:t>
+            </a:r>
           </a:p>
         </p:txBody>
       </p:sp>
@@ -8074,10 +8095,10 @@
       </p:cxnSp>
       <p:sp>
         <p:nvSpPr>
-          <p:cNvPr id="3" name="Date Placeholder 2">
+          <p:cNvPr id="6" name="Espace réservé du numéro de diapositive 5">
             <a:extLst>
               <a:ext uri="{FF2B5EF4-FFF2-40B4-BE49-F238E27FC236}">
-                <a16:creationId xmlns:a16="http://schemas.microsoft.com/office/drawing/2014/main" id="{70F60659-B2D1-41B6-8A1C-AAD19F21D529}"/>
+                <a16:creationId xmlns:a16="http://schemas.microsoft.com/office/drawing/2014/main" id="{88272FD6-24FF-30F3-78A0-42F7FACB578C}"/>
               </a:ext>
             </a:extLst>
           </p:cNvPr>
@@ -8085,7 +8106,7 @@
             <a:spLocks noGrp="1"/>
           </p:cNvSpPr>
           <p:nvPr>
-            <p:ph type="dt" sz="half" idx="10"/>
+            <p:ph type="sldNum" idx="12"/>
           </p:nvPr>
         </p:nvSpPr>
         <p:spPr/>
@@ -8093,39 +8114,12 @@
           <a:bodyPr/>
           <a:lstStyle/>
           <a:p>
-            <a:r>
-              <a:rPr lang="en-US"/>
-              <a:t>15-17/10/2024</a:t>
-            </a:r>
+            <a:fld id="{00000000-1234-1234-1234-123412341234}" type="slidenum">
+              <a:rPr lang="en-GB" smtClean="0"/>
+              <a:pPr/>
+              <a:t>3</a:t>
+            </a:fld>
             <a:endParaRPr lang="en-GB"/>
-          </a:p>
-        </p:txBody>
-      </p:sp>
-      <p:sp>
-        <p:nvSpPr>
-          <p:cNvPr id="4" name="Footer Placeholder 3">
-            <a:extLst>
-              <a:ext uri="{FF2B5EF4-FFF2-40B4-BE49-F238E27FC236}">
-                <a16:creationId xmlns:a16="http://schemas.microsoft.com/office/drawing/2014/main" id="{6EA8026C-BE82-4662-873C-4B61A7A185D6}"/>
-              </a:ext>
-            </a:extLst>
-          </p:cNvPr>
-          <p:cNvSpPr>
-            <a:spLocks noGrp="1"/>
-          </p:cNvSpPr>
-          <p:nvPr>
-            <p:ph type="ftr" sz="quarter" idx="11"/>
-          </p:nvPr>
-        </p:nvSpPr>
-        <p:spPr/>
-        <p:txBody>
-          <a:bodyPr/>
-          <a:lstStyle/>
-          <a:p>
-            <a:r>
-              <a:rPr lang="en-GB"/>
-              <a:t>CONTRACTORS ORGANISING SOME OF THE COURSES ARE ACTING UNDER A FRAMEWORK CONTRACT CONCLUDED WITH THE COMMISSION</a:t>
-            </a:r>
           </a:p>
         </p:txBody>
       </p:sp>
@@ -8190,6 +8184,35 @@
       </p:sp>
       <p:sp>
         <p:nvSpPr>
+          <p:cNvPr id="6" name="Espace réservé du numéro de diapositive 5">
+            <a:extLst>
+              <a:ext uri="{FF2B5EF4-FFF2-40B4-BE49-F238E27FC236}">
+                <a16:creationId xmlns:a16="http://schemas.microsoft.com/office/drawing/2014/main" id="{F16AFC23-3F30-CD0E-8B37-AC85BF664EDB}"/>
+              </a:ext>
+            </a:extLst>
+          </p:cNvPr>
+          <p:cNvSpPr>
+            <a:spLocks noGrp="1"/>
+          </p:cNvSpPr>
+          <p:nvPr>
+            <p:ph type="sldNum" idx="12"/>
+          </p:nvPr>
+        </p:nvSpPr>
+        <p:spPr/>
+        <p:txBody>
+          <a:bodyPr/>
+          <a:lstStyle/>
+          <a:p>
+            <a:fld id="{FB124247-1BA6-4B56-A733-0053039570D1}" type="slidenum">
+              <a:rPr lang="en-GB" smtClean="0"/>
+              <a:t>4</a:t>
+            </a:fld>
+            <a:endParaRPr lang="en-GB"/>
+          </a:p>
+        </p:txBody>
+      </p:sp>
+      <p:sp>
+        <p:nvSpPr>
           <p:cNvPr id="3" name="Content Placeholder 2">
             <a:extLst>
               <a:ext uri="{FF2B5EF4-FFF2-40B4-BE49-F238E27FC236}">
@@ -8201,7 +8224,7 @@
             <a:spLocks noGrp="1"/>
           </p:cNvSpPr>
           <p:nvPr>
-            <p:ph idx="1"/>
+            <p:ph sz="half" idx="2"/>
           </p:nvPr>
         </p:nvSpPr>
         <p:spPr/>
@@ -8210,160 +8233,132 @@
           <a:lstStyle/>
           <a:p>
             <a:r>
-              <a:rPr lang="fr-BE" dirty="0" err="1"/>
+              <a:rPr lang="fr-BE" sz="2400" dirty="0" err="1"/>
               <a:t>Jdplus</a:t>
             </a:r>
             <a:r>
-              <a:rPr lang="fr-BE" dirty="0"/>
+              <a:rPr lang="fr-BE" sz="2400" dirty="0"/>
               <a:t>-main</a:t>
             </a:r>
           </a:p>
           <a:p>
             <a:pPr lvl="1"/>
             <a:r>
-              <a:rPr lang="fr-BE" dirty="0"/>
+              <a:rPr lang="fr-BE" sz="2000" dirty="0"/>
               <a:t>Base</a:t>
             </a:r>
           </a:p>
           <a:p>
             <a:pPr lvl="2"/>
             <a:r>
-              <a:rPr lang="fr-BE" dirty="0"/>
+              <a:rPr lang="fr-BE" sz="1800" dirty="0"/>
               <a:t>Toolkit / Sa / </a:t>
             </a:r>
             <a:r>
-              <a:rPr lang="fr-BE" dirty="0" err="1"/>
+              <a:rPr lang="fr-BE" sz="1800" dirty="0" err="1"/>
               <a:t>TramoSeats</a:t>
             </a:r>
             <a:r>
-              <a:rPr lang="fr-BE" dirty="0"/>
+              <a:rPr lang="fr-BE" sz="1800" dirty="0"/>
               <a:t> / X13 / Ts providers</a:t>
             </a:r>
           </a:p>
           <a:p>
             <a:pPr lvl="2"/>
             <a:r>
-              <a:rPr lang="fr-BE" dirty="0"/>
+              <a:rPr lang="fr-BE" sz="1800" dirty="0"/>
               <a:t>API / </a:t>
             </a:r>
             <a:r>
-              <a:rPr lang="fr-BE" dirty="0" err="1"/>
+              <a:rPr lang="fr-BE" sz="1800" dirty="0" err="1"/>
               <a:t>Core</a:t>
             </a:r>
             <a:r>
-              <a:rPr lang="fr-BE" dirty="0"/>
+              <a:rPr lang="fr-BE" sz="1800" dirty="0"/>
               <a:t> / R / </a:t>
             </a:r>
             <a:r>
-              <a:rPr lang="fr-BE" dirty="0" err="1"/>
+              <a:rPr lang="fr-BE" sz="1800" dirty="0" err="1"/>
               <a:t>Protobuf</a:t>
             </a:r>
             <a:r>
-              <a:rPr lang="fr-BE" dirty="0"/>
+              <a:rPr lang="fr-BE" sz="1800" dirty="0"/>
               <a:t> …</a:t>
             </a:r>
           </a:p>
           <a:p>
             <a:pPr lvl="1"/>
             <a:r>
-              <a:rPr lang="fr-BE" dirty="0" err="1"/>
+              <a:rPr lang="fr-BE" sz="2000" dirty="0" err="1"/>
               <a:t>Cli</a:t>
             </a:r>
             <a:r>
-              <a:rPr lang="fr-BE" dirty="0"/>
+              <a:rPr lang="fr-BE" sz="2000" dirty="0"/>
               <a:t> (cruncher…)</a:t>
             </a:r>
           </a:p>
           <a:p>
             <a:pPr lvl="1"/>
             <a:r>
-              <a:rPr lang="fr-BE" dirty="0"/>
+              <a:rPr lang="fr-BE" sz="2000" dirty="0"/>
               <a:t>Desktop (GUI)</a:t>
             </a:r>
           </a:p>
           <a:p>
             <a:r>
-              <a:rPr lang="fr-BE" dirty="0" err="1"/>
+              <a:rPr lang="fr-BE" sz="2400" dirty="0" err="1"/>
               <a:t>Jdplus-incubator</a:t>
             </a:r>
+            <a:endParaRPr lang="fr-BE" sz="2400" dirty="0"/>
+          </a:p>
+          <a:p>
+            <a:pPr lvl="1"/>
+            <a:r>
+              <a:rPr lang="fr-BE" sz="2000" dirty="0"/>
+              <a:t>STL, STS, high-</a:t>
+            </a:r>
+            <a:r>
+              <a:rPr lang="fr-BE" sz="2000" dirty="0" err="1"/>
+              <a:t>frequency</a:t>
+            </a:r>
+            <a:r>
+              <a:rPr lang="fr-BE" sz="2000" dirty="0"/>
+              <a:t>…</a:t>
+            </a:r>
+          </a:p>
+          <a:p>
+            <a:r>
+              <a:rPr lang="fr-BE" sz="2400" dirty="0" err="1"/>
+              <a:t>Jdplus-experimental</a:t>
+            </a:r>
+            <a:endParaRPr lang="fr-BE" sz="2400" dirty="0"/>
+          </a:p>
+          <a:p>
+            <a:r>
+              <a:rPr lang="fr-BE" sz="2400" dirty="0" err="1"/>
+              <a:t>Jdplus</a:t>
+            </a:r>
+            <a:r>
+              <a:rPr lang="fr-BE" sz="2400" dirty="0"/>
+              <a:t>-benchmarking / </a:t>
+            </a:r>
+            <a:r>
+              <a:rPr lang="fr-BE" sz="2400" dirty="0" err="1"/>
+              <a:t>jdplus-nowcasting</a:t>
+            </a:r>
+            <a:r>
+              <a:rPr lang="fr-BE" sz="2400" dirty="0"/>
+              <a:t> / </a:t>
+            </a:r>
+            <a:r>
+              <a:rPr lang="fr-BE" sz="2400" dirty="0" err="1"/>
+              <a:t>jdplus-revisions</a:t>
+            </a:r>
+            <a:r>
+              <a:rPr lang="fr-BE" sz="2400" dirty="0"/>
+              <a:t>…</a:t>
+            </a:r>
             <a:endParaRPr lang="fr-BE" dirty="0"/>
-          </a:p>
-          <a:p>
-            <a:pPr lvl="1"/>
-            <a:r>
-              <a:rPr lang="fr-BE" dirty="0"/>
-              <a:t>STL, STS, high-</a:t>
-            </a:r>
-            <a:r>
-              <a:rPr lang="fr-BE" dirty="0" err="1"/>
-              <a:t>frequency</a:t>
-            </a:r>
-            <a:r>
-              <a:rPr lang="fr-BE" dirty="0"/>
-              <a:t>…</a:t>
-            </a:r>
-          </a:p>
-          <a:p>
-            <a:r>
-              <a:rPr lang="fr-BE" dirty="0" err="1"/>
-              <a:t>Jdplus-experimental</a:t>
-            </a:r>
-            <a:endParaRPr lang="fr-BE" dirty="0"/>
-          </a:p>
-          <a:p>
-            <a:r>
-              <a:rPr lang="fr-BE" dirty="0" err="1"/>
-              <a:t>Jdplus</a:t>
-            </a:r>
-            <a:r>
-              <a:rPr lang="fr-BE" dirty="0"/>
-              <a:t>-benchmarking / </a:t>
-            </a:r>
-            <a:r>
-              <a:rPr lang="fr-BE" dirty="0" err="1"/>
-              <a:t>jdplus-nowcasting</a:t>
-            </a:r>
-            <a:r>
-              <a:rPr lang="fr-BE" dirty="0"/>
-              <a:t> / </a:t>
-            </a:r>
-            <a:r>
-              <a:rPr lang="fr-BE" dirty="0" err="1"/>
-              <a:t>jdplus-revisions</a:t>
-            </a:r>
-            <a:r>
-              <a:rPr lang="fr-BE" dirty="0"/>
-              <a:t>…</a:t>
-            </a:r>
-          </a:p>
-        </p:txBody>
-      </p:sp>
-      <p:sp>
-        <p:nvSpPr>
-          <p:cNvPr id="4" name="Date Placeholder 3">
-            <a:extLst>
-              <a:ext uri="{FF2B5EF4-FFF2-40B4-BE49-F238E27FC236}">
-                <a16:creationId xmlns:a16="http://schemas.microsoft.com/office/drawing/2014/main" id="{530BD2BC-D1C5-DB43-FE2B-7EB12B8FC830}"/>
-              </a:ext>
-            </a:extLst>
-          </p:cNvPr>
-          <p:cNvSpPr>
-            <a:spLocks noGrp="1"/>
-          </p:cNvSpPr>
-          <p:nvPr>
-            <p:ph type="dt" sz="half" idx="10"/>
-          </p:nvPr>
-        </p:nvSpPr>
-        <p:spPr/>
-        <p:txBody>
-          <a:bodyPr/>
-          <a:lstStyle/>
-          <a:p>
-            <a:r>
-              <a:rPr lang="en-US"/>
-              <a:t>15-17/10/2024</a:t>
-            </a:r>
-            <a:endParaRPr lang="en-GB"/>
           </a:p>
         </p:txBody>
       </p:sp>
@@ -8380,17 +8375,22 @@
             <a:spLocks noGrp="1"/>
           </p:cNvSpPr>
           <p:nvPr>
-            <p:ph type="ftr" sz="quarter" idx="11"/>
+            <p:ph type="ftr" sz="quarter" idx="4294967295"/>
           </p:nvPr>
         </p:nvSpPr>
-        <p:spPr/>
+        <p:spPr>
+          <a:xfrm>
+            <a:off x="0" y="0"/>
+            <a:ext cx="0" cy="0"/>
+          </a:xfrm>
+        </p:spPr>
         <p:txBody>
           <a:bodyPr/>
           <a:lstStyle/>
           <a:p>
             <a:r>
               <a:rPr lang="en-GB"/>
-              <a:t>CONTRACTORS ORGANISING SOME OF THE COURSES ARE ACTING UNDER A FRAMEWORK CONTRACT CONCLUDED WITH THE COMMISSION</a:t>
+              <a:t>JD+ 3.x</a:t>
             </a:r>
           </a:p>
         </p:txBody>
@@ -9390,15 +9390,6 @@
 </file>
 
 <file path=customXml/item1.xml><?xml version="1.0" encoding="utf-8"?>
-<?mso-contentType ?>
-<FormTemplates xmlns="http://schemas.microsoft.com/sharepoint/v3/contenttype/forms">
-  <Display>DocumentLibraryForm</Display>
-  <Edit>DocumentLibraryForm</Edit>
-  <New>DocumentLibraryForm</New>
-</FormTemplates>
-</file>
-
-<file path=customXml/item2.xml><?xml version="1.0" encoding="utf-8"?>
 <p:properties xmlns:p="http://schemas.microsoft.com/office/2006/metadata/properties" xmlns:xsi="http://www.w3.org/2001/XMLSchema-instance" xmlns:pc="http://schemas.microsoft.com/office/infopath/2007/PartnerControls">
   <documentManagement>
     <lcf76f155ced4ddcb4097134ff3c332f xmlns="0e422b70-e85d-4377-8ee0-b6227433d381">
@@ -9407,6 +9398,15 @@
     <TaxCatchAll xmlns="199f642e-5af9-486c-ac06-f366742ef41a"/>
   </documentManagement>
 </p:properties>
+</file>
+
+<file path=customXml/item2.xml><?xml version="1.0" encoding="utf-8"?>
+<?mso-contentType ?>
+<FormTemplates xmlns="http://schemas.microsoft.com/sharepoint/v3/contenttype/forms">
+  <Display>DocumentLibraryForm</Display>
+  <Edit>DocumentLibraryForm</Edit>
+  <New>DocumentLibraryForm</New>
+</FormTemplates>
 </file>
 
 <file path=customXml/item3.xml><?xml version="1.0" encoding="utf-8"?>
@@ -9651,14 +9651,6 @@
 </file>
 
 <file path=customXml/itemProps1.xml><?xml version="1.0" encoding="utf-8"?>
-<ds:datastoreItem xmlns:ds="http://schemas.openxmlformats.org/officeDocument/2006/customXml" ds:itemID="{67DD9E9F-9EEB-4105-B29B-819486C2855A}">
-  <ds:schemaRefs>
-    <ds:schemaRef ds:uri="http://schemas.microsoft.com/sharepoint/v3/contenttype/forms"/>
-  </ds:schemaRefs>
-</ds:datastoreItem>
-</file>
-
-<file path=customXml/itemProps2.xml><?xml version="1.0" encoding="utf-8"?>
 <ds:datastoreItem xmlns:ds="http://schemas.openxmlformats.org/officeDocument/2006/customXml" ds:itemID="{2D6C293B-B8B4-4284-A17E-9F9E4C32B25A}">
   <ds:schemaRefs>
     <ds:schemaRef ds:uri="http://schemas.microsoft.com/office/2006/documentManagement/types"/>
@@ -9671,6 +9663,14 @@
     <ds:schemaRef ds:uri="http://schemas.openxmlformats.org/package/2006/metadata/core-properties"/>
     <ds:schemaRef ds:uri="http://schemas.microsoft.com/office/2006/metadata/properties"/>
     <ds:schemaRef ds:uri="http://www.w3.org/XML/1998/namespace"/>
+  </ds:schemaRefs>
+</ds:datastoreItem>
+</file>
+
+<file path=customXml/itemProps2.xml><?xml version="1.0" encoding="utf-8"?>
+<ds:datastoreItem xmlns:ds="http://schemas.openxmlformats.org/officeDocument/2006/customXml" ds:itemID="{67DD9E9F-9EEB-4105-B29B-819486C2855A}">
+  <ds:schemaRefs>
+    <ds:schemaRef ds:uri="http://schemas.microsoft.com/sharepoint/v3/contenttype/forms"/>
   </ds:schemaRefs>
 </ds:datastoreItem>
 </file>
